--- a/word-drafts/figures/AAS-Fig6-SubmodelConcept.pptx
+++ b/word-drafts/figures/AAS-Fig6-SubmodelConcept.pptx
@@ -3750,7 +3750,7 @@
         <p:spPr>
           <a:xfrm>
             <a:off x="7167562" y="1228725"/>
-            <a:ext cx="485775" cy="123825"/>
+            <a:ext cx="609600" cy="123825"/>
           </a:xfrm>
           <a:prstGeom prst="rect">
             <a:avLst/>
@@ -3822,7 +3822,7 @@
         <p:spPr>
           <a:xfrm>
             <a:off x="8453437" y="1228725"/>
-            <a:ext cx="485775" cy="123825"/>
+            <a:ext cx="609600" cy="123825"/>
           </a:xfrm>
           <a:prstGeom prst="rect">
             <a:avLst/>
@@ -3894,7 +3894,7 @@
         <p:spPr>
           <a:xfrm>
             <a:off x="3952875" y="2314575"/>
-            <a:ext cx="619125" cy="123825"/>
+            <a:ext cx="762000" cy="123825"/>
           </a:xfrm>
           <a:prstGeom prst="rect">
             <a:avLst/>
@@ -4005,7 +4005,7 @@
         <p:spPr>
           <a:xfrm>
             <a:off x="5238750" y="2314575"/>
-            <a:ext cx="495300" cy="123825"/>
+            <a:ext cx="619125" cy="123825"/>
           </a:xfrm>
           <a:prstGeom prst="rect">
             <a:avLst/>
@@ -4077,7 +4077,7 @@
         <p:spPr>
           <a:xfrm>
             <a:off x="6524625" y="2314575"/>
-            <a:ext cx="495300" cy="123825"/>
+            <a:ext cx="619125" cy="123825"/>
           </a:xfrm>
           <a:prstGeom prst="rect">
             <a:avLst/>
@@ -4149,7 +4149,7 @@
         <p:spPr>
           <a:xfrm>
             <a:off x="7810500" y="2314575"/>
-            <a:ext cx="495300" cy="123825"/>
+            <a:ext cx="619125" cy="123825"/>
           </a:xfrm>
           <a:prstGeom prst="rect">
             <a:avLst/>
@@ -4221,7 +4221,7 @@
         <p:spPr>
           <a:xfrm>
             <a:off x="9096375" y="2314575"/>
-            <a:ext cx="495300" cy="123825"/>
+            <a:ext cx="619125" cy="123825"/>
           </a:xfrm>
           <a:prstGeom prst="rect">
             <a:avLst/>
@@ -4293,7 +4293,7 @@
         <p:spPr>
           <a:xfrm>
             <a:off x="10382250" y="2314575"/>
-            <a:ext cx="495300" cy="123825"/>
+            <a:ext cx="619125" cy="123825"/>
           </a:xfrm>
           <a:prstGeom prst="rect">
             <a:avLst/>
@@ -4365,7 +4365,7 @@
         <p:spPr>
           <a:xfrm>
             <a:off x="8453437" y="3286125"/>
-            <a:ext cx="495300" cy="123825"/>
+            <a:ext cx="619125" cy="123825"/>
           </a:xfrm>
           <a:prstGeom prst="rect">
             <a:avLst/>
